--- a/data-eng/decks/w3d5s2.pptx
+++ b/data-eng/decks/w3d5s2.pptx
@@ -3100,7 +3100,7 @@
       <p:grpSpPr/>
       <p:sp>
         <p:nvSpPr>
-          <p:cNvPr id="2" name="Oval 1"/>
+          <p:cNvPr id="2" name="deckgen:decor"/>
           <p:cNvSpPr/>
           <p:nvPr/>
         </p:nvSpPr>
@@ -3130,7 +3130,7 @@
       </p:sp>
       <p:sp>
         <p:nvSpPr>
-          <p:cNvPr id="3" name="Oval 2"/>
+          <p:cNvPr id="3" name="deckgen:decor"/>
           <p:cNvSpPr/>
           <p:nvPr/>
         </p:nvSpPr>
@@ -3160,7 +3160,7 @@
       </p:sp>
       <p:sp>
         <p:nvSpPr>
-          <p:cNvPr id="4" name="Oval 3"/>
+          <p:cNvPr id="4" name="deckgen:decor"/>
           <p:cNvSpPr/>
           <p:nvPr/>
         </p:nvSpPr>
@@ -3190,7 +3190,7 @@
       </p:sp>
       <p:sp>
         <p:nvSpPr>
-          <p:cNvPr id="5" name="Rectangle 4"/>
+          <p:cNvPr id="5" name="deckgen:decor"/>
           <p:cNvSpPr/>
           <p:nvPr/>
         </p:nvSpPr>
@@ -3220,7 +3220,7 @@
       </p:sp>
       <p:sp>
         <p:nvSpPr>
-          <p:cNvPr id="6" name="Oval 5"/>
+          <p:cNvPr id="6" name="deckgen:decor"/>
           <p:cNvSpPr/>
           <p:nvPr/>
         </p:nvSpPr>
@@ -3250,7 +3250,7 @@
       </p:sp>
       <p:sp>
         <p:nvSpPr>
-          <p:cNvPr id="7" name="Oval 6"/>
+          <p:cNvPr id="7" name="deckgen:decor"/>
           <p:cNvSpPr/>
           <p:nvPr/>
         </p:nvSpPr>
@@ -3280,7 +3280,7 @@
       </p:sp>
       <p:sp>
         <p:nvSpPr>
-          <p:cNvPr id="8" name="Oval 7"/>
+          <p:cNvPr id="8" name="deckgen:decor"/>
           <p:cNvSpPr/>
           <p:nvPr/>
         </p:nvSpPr>
@@ -3310,7 +3310,7 @@
       </p:sp>
       <p:sp>
         <p:nvSpPr>
-          <p:cNvPr id="9" name="Oval 8"/>
+          <p:cNvPr id="9" name="deckgen:decor"/>
           <p:cNvSpPr/>
           <p:nvPr/>
         </p:nvSpPr>
@@ -3340,7 +3340,7 @@
       </p:sp>
       <p:sp>
         <p:nvSpPr>
-          <p:cNvPr id="10" name="Rectangle 9"/>
+          <p:cNvPr id="10" name="deckgen:decor"/>
           <p:cNvSpPr/>
           <p:nvPr/>
         </p:nvSpPr>
@@ -3600,7 +3600,7 @@
       <p:grpSpPr/>
       <p:sp>
         <p:nvSpPr>
-          <p:cNvPr id="2" name="Oval 1"/>
+          <p:cNvPr id="2" name="deckgen:decor"/>
           <p:cNvSpPr/>
           <p:nvPr/>
         </p:nvSpPr>
@@ -3630,7 +3630,7 @@
       </p:sp>
       <p:sp>
         <p:nvSpPr>
-          <p:cNvPr id="3" name="Oval 2"/>
+          <p:cNvPr id="3" name="deckgen:decor"/>
           <p:cNvSpPr/>
           <p:nvPr/>
         </p:nvSpPr>
@@ -3660,7 +3660,7 @@
       </p:sp>
       <p:sp>
         <p:nvSpPr>
-          <p:cNvPr id="4" name="Oval 3"/>
+          <p:cNvPr id="4" name="deckgen:decor"/>
           <p:cNvSpPr/>
           <p:nvPr/>
         </p:nvSpPr>
@@ -3941,7 +3941,7 @@
                 <a:ea typeface="Pretendard"/>
                 <a:cs typeface="Pretendard"/>
               </a:rPr>
-              <a:t>baseline 에 rows 1015 · dup_orders 15 가 찍힌다</a:t>
+              <a:t>baseline.py — 1015 · 30 · 15 · 5, ' 식품 ' 20 이 따로</a:t>
             </a:r>
           </a:p>
         </p:txBody>
@@ -4087,7 +4087,7 @@
                 <a:ea typeface="Pretendard"/>
                 <a:cs typeface="Pretendard"/>
               </a:rPr>
-              <a:t>GROUP BY category 에 '식품' 과 ' 식품 ' 이 따로 나온다</a:t>
+              <a:t>「1015 행 -&gt; 1000 행 정제 완료」 · orders_clean.parquet 생성</a:t>
             </a:r>
           </a:p>
         </p:txBody>
@@ -4233,7 +4233,7 @@
                 <a:ea typeface="Pretendard"/>
                 <a:cs typeface="Pretendard"/>
               </a:rPr>
-              <a:t>「1015 행 -&gt; 1000 행 정제 완료」 · orders_clean.parquet 생성</a:t>
+              <a:t>check_rerun.py — 세 줄 모두 True</a:t>
             </a:r>
           </a:p>
         </p:txBody>
@@ -4379,7 +4379,7 @@
                 <a:ea typeface="Pretendard"/>
                 <a:cs typeface="Pretendard"/>
               </a:rPr>
-              <a:t>두 번 돌려 세 줄 모두 True</a:t>
+              <a:t>order_test.py — 100500.0 vs 101000.0 · 같은가: False</a:t>
             </a:r>
           </a:p>
         </p:txBody>
@@ -4525,7 +4525,7 @@
                 <a:ea typeface="Pretendard"/>
                 <a:cs typeface="Pretendard"/>
               </a:rPr>
-              <a:t>나쁜 값을 넣으면 price_le_0 1 · unknown_cat 1 로 잡힌다</a:t>
+              <a:t>validate_test.py — 첫 줄 모두 0, 나쁜 값엔 price_le_0 1 · unknown_cat 1</a:t>
             </a:r>
           </a:p>
         </p:txBody>
@@ -4808,7 +4808,7 @@
       <p:grpSpPr/>
       <p:sp>
         <p:nvSpPr>
-          <p:cNvPr id="2" name="Oval 1"/>
+          <p:cNvPr id="2" name="deckgen:decor"/>
           <p:cNvSpPr/>
           <p:nvPr/>
         </p:nvSpPr>
@@ -4838,7 +4838,7 @@
       </p:sp>
       <p:sp>
         <p:nvSpPr>
-          <p:cNvPr id="3" name="Oval 2"/>
+          <p:cNvPr id="3" name="deckgen:decor"/>
           <p:cNvSpPr/>
           <p:nvPr/>
         </p:nvSpPr>
@@ -5615,7 +5615,7 @@
       <p:grpSpPr/>
       <p:sp>
         <p:nvSpPr>
-          <p:cNvPr id="2" name="Oval 1"/>
+          <p:cNvPr id="2" name="deckgen:decor"/>
           <p:cNvSpPr/>
           <p:nvPr/>
         </p:nvSpPr>
@@ -5645,7 +5645,7 @@
       </p:sp>
       <p:sp>
         <p:nvSpPr>
-          <p:cNvPr id="3" name="Oval 2"/>
+          <p:cNvPr id="3" name="deckgen:decor"/>
           <p:cNvSpPr/>
           <p:nvPr/>
         </p:nvSpPr>
@@ -5675,7 +5675,7 @@
       </p:sp>
       <p:sp>
         <p:nvSpPr>
-          <p:cNvPr id="4" name="Oval 3"/>
+          <p:cNvPr id="4" name="deckgen:decor"/>
           <p:cNvSpPr/>
           <p:nvPr/>
         </p:nvSpPr>
@@ -6606,7 +6606,7 @@
       <p:grpSpPr/>
       <p:sp>
         <p:nvSpPr>
-          <p:cNvPr id="2" name="Oval 1"/>
+          <p:cNvPr id="2" name="deckgen:decor"/>
           <p:cNvSpPr/>
           <p:nvPr/>
         </p:nvSpPr>
@@ -6636,7 +6636,7 @@
       </p:sp>
       <p:sp>
         <p:nvSpPr>
-          <p:cNvPr id="3" name="Oval 2"/>
+          <p:cNvPr id="3" name="deckgen:decor"/>
           <p:cNvSpPr/>
           <p:nvPr/>
         </p:nvSpPr>
@@ -6666,7 +6666,7 @@
       </p:sp>
       <p:sp>
         <p:nvSpPr>
-          <p:cNvPr id="4" name="Oval 3"/>
+          <p:cNvPr id="4" name="deckgen:decor"/>
           <p:cNvSpPr/>
           <p:nvPr/>
         </p:nvSpPr>
@@ -7799,7 +7799,7 @@
       <p:grpSpPr/>
       <p:sp>
         <p:nvSpPr>
-          <p:cNvPr id="2" name="Oval 1"/>
+          <p:cNvPr id="2" name="deckgen:decor"/>
           <p:cNvSpPr/>
           <p:nvPr/>
         </p:nvSpPr>
@@ -7829,7 +7829,7 @@
       </p:sp>
       <p:sp>
         <p:nvSpPr>
-          <p:cNvPr id="3" name="Oval 2"/>
+          <p:cNvPr id="3" name="deckgen:decor"/>
           <p:cNvSpPr/>
           <p:nvPr/>
         </p:nvSpPr>
@@ -7859,7 +7859,7 @@
       </p:sp>
       <p:sp>
         <p:nvSpPr>
-          <p:cNvPr id="4" name="Oval 3"/>
+          <p:cNvPr id="4" name="deckgen:decor"/>
           <p:cNvSpPr/>
           <p:nvPr/>
         </p:nvSpPr>
@@ -7964,7 +7964,7 @@
                 <a:ea typeface="Pretendard"/>
                 <a:cs typeface="Pretendard"/>
               </a:rPr>
-              <a:t>원본의 품질 기준선 — DuckDB 한 문장</a:t>
+              <a:t>원본의 품질 기준선 — baseline.py</a:t>
             </a:r>
           </a:p>
         </p:txBody>
@@ -8282,7 +8282,7 @@
                 <a:ea typeface="Pretendard"/>
                 <a:cs typeface="Pretendard"/>
               </a:rPr>
-              <a:t>count(*) - count(price) → 30 이상</a:t>
+              <a:t>count(*) - count(price) → 30</a:t>
             </a:r>
           </a:p>
         </p:txBody>
@@ -8570,7 +8570,7 @@
                 <a:ea typeface="Pretendard"/>
                 <a:cs typeface="Pretendard"/>
               </a:rPr>
-              <a:t>count(DISTINCT category) → 4 보다 큼</a:t>
+              <a:t>count(DISTINCT category) → 5</a:t>
             </a:r>
           </a:p>
         </p:txBody>
@@ -8714,7 +8714,7 @@
                 <a:ea typeface="Pretendard"/>
                 <a:cs typeface="Pretendard"/>
               </a:rPr>
-              <a:t>GROUP BY category — '식품' 과 ' 식품 ' 이 따로</a:t>
+              <a:t>GROUP BY category — 식품 396 과 ' 식품 ' 20 이 따로</a:t>
             </a:r>
           </a:p>
         </p:txBody>
@@ -8892,7 +8892,7 @@
       <p:grpSpPr/>
       <p:sp>
         <p:nvSpPr>
-          <p:cNvPr id="2" name="Oval 1"/>
+          <p:cNvPr id="2" name="deckgen:decor"/>
           <p:cNvSpPr/>
           <p:nvPr/>
         </p:nvSpPr>
@@ -8922,7 +8922,7 @@
       </p:sp>
       <p:sp>
         <p:nvSpPr>
-          <p:cNvPr id="3" name="Oval 2"/>
+          <p:cNvPr id="3" name="deckgen:decor"/>
           <p:cNvSpPr/>
           <p:nvPr/>
         </p:nvSpPr>
@@ -8952,7 +8952,7 @@
       </p:sp>
       <p:sp>
         <p:nvSpPr>
-          <p:cNvPr id="4" name="Oval 3"/>
+          <p:cNvPr id="4" name="deckgen:decor"/>
           <p:cNvSpPr/>
           <p:nvPr/>
         </p:nvSpPr>
@@ -9529,7 +9529,7 @@
                 <a:ea typeface="Pretendard"/>
                 <a:cs typeface="Pretendard"/>
               </a:rPr>
-              <a:t>order_date 타입 복원</a:t>
+              <a:t>DuckDB 면 이미 날짜 — read_csv 대비</a:t>
             </a:r>
           </a:p>
         </p:txBody>
@@ -10061,7 +10061,7 @@
                 <a:ea typeface="Pretendard"/>
                 <a:cs typeface="Pretendard"/>
               </a:rPr>
-              <a:t>clean() 은 df.copy() 로 시작 — 원본을 건드리지 않겠다는 선언이고, 3-1 의 SettingWithCopyWarning 도 예방</a:t>
+              <a:t>df.copy() 로 시작 — out = df 면 받은 원본까지 바뀐다(pandas 3 도). 3단계 「두 번 돌려도 같은가」가 여기에 기댄다</a:t>
             </a:r>
           </a:p>
         </p:txBody>
@@ -10198,7 +10198,7 @@
       <p:grpSpPr/>
       <p:sp>
         <p:nvSpPr>
-          <p:cNvPr id="2" name="Oval 1"/>
+          <p:cNvPr id="2" name="deckgen:decor"/>
           <p:cNvSpPr/>
           <p:nvPr/>
         </p:nvSpPr>
@@ -10228,7 +10228,7 @@
       </p:sp>
       <p:sp>
         <p:nvSpPr>
-          <p:cNvPr id="3" name="Oval 2"/>
+          <p:cNvPr id="3" name="deckgen:decor"/>
           <p:cNvSpPr/>
           <p:nvPr/>
         </p:nvSpPr>
@@ -10258,7 +10258,7 @@
       </p:sp>
       <p:sp>
         <p:nvSpPr>
-          <p:cNvPr id="4" name="Oval 3"/>
+          <p:cNvPr id="4" name="deckgen:decor"/>
           <p:cNvSpPr/>
           <p:nvPr/>
         </p:nvSpPr>
@@ -10726,7 +10726,7 @@
                 <a:ea typeface="Pretendard"/>
                 <a:cs typeface="Pretendard"/>
               </a:rPr>
-              <a:t>clean(load_raw()) 두 번</a:t>
+              <a:t>python3 check_rerun.py</a:t>
             </a:r>
           </a:p>
         </p:txBody>
@@ -11225,7 +11225,7 @@
       <p:grpSpPr/>
       <p:sp>
         <p:nvSpPr>
-          <p:cNvPr id="2" name="Oval 1"/>
+          <p:cNvPr id="2" name="deckgen:decor"/>
           <p:cNvSpPr/>
           <p:nvPr/>
         </p:nvSpPr>
@@ -11255,7 +11255,7 @@
       </p:sp>
       <p:sp>
         <p:nvSpPr>
-          <p:cNvPr id="3" name="Oval 2"/>
+          <p:cNvPr id="3" name="deckgen:decor"/>
           <p:cNvSpPr/>
           <p:nvPr/>
         </p:nvSpPr>
@@ -11285,7 +11285,7 @@
       </p:sp>
       <p:sp>
         <p:nvSpPr>
-          <p:cNvPr id="4" name="Oval 3"/>
+          <p:cNvPr id="4" name="deckgen:decor"/>
           <p:cNvSpPr/>
           <p:nvPr/>
         </p:nvSpPr>
@@ -11390,7 +11390,7 @@
                 <a:ea typeface="Pretendard"/>
                 <a:cs typeface="Pretendard"/>
               </a:rPr>
-              <a:t>순서를 바꾸면 중앙값이 달라지는가</a:t>
+              <a:t>순서를 바꾸면 중앙값이 달라진다 — 실제로</a:t>
             </a:r>
           </a:p>
         </p:txBody>
@@ -11607,7 +11607,7 @@
                 <a:ea typeface="Pretendard"/>
                 <a:cs typeface="Pretendard"/>
               </a:rPr>
-              <a:t>drop_duplicates(subset='order_id') 뒤 price.median() → med_a</a:t>
+              <a:t>drop_duplicates(subset='order_id') 뒤 median() → 100500.0</a:t>
             </a:r>
           </a:p>
         </p:txBody>
@@ -11794,7 +11794,7 @@
                 <a:ea typeface="Pretendard"/>
                 <a:cs typeface="Pretendard"/>
               </a:rPr>
-              <a:t>raw.copy() 그대로 price.median() → med_b</a:t>
+              <a:t>raw.copy() 그대로 median() → 101000.0</a:t>
             </a:r>
           </a:p>
         </p:txBody>
@@ -11940,7 +11940,7 @@
                 <a:ea typeface="Pretendard"/>
                 <a:cs typeface="Pretendard"/>
               </a:rPr>
-              <a:t>같은가?</a:t>
+              <a:t>같은가: False</a:t>
             </a:r>
           </a:p>
         </p:txBody>
@@ -11981,7 +11981,7 @@
                 <a:ea typeface="Pretendard"/>
                 <a:cs typeface="Pretendard"/>
               </a:rPr>
-              <a:t>이 데이터에선 같거나 아주 비슷할 수 있다 — 중복이 15건뿐이라 영향이 작다</a:t>
+              <a:t>중복 15건이 두 번 세어져 가운데 값이 500원 밀린다</a:t>
             </a:r>
           </a:p>
         </p:txBody>
@@ -12056,7 +12056,7 @@
                 <a:ea typeface="Pretendard"/>
                 <a:cs typeface="Pretendard"/>
               </a:rPr>
-              <a:t>기억할 것</a:t>
+              <a:t>order_test.py</a:t>
             </a:r>
           </a:p>
         </p:txBody>
@@ -12097,7 +12097,7 @@
                 <a:ea typeface="Pretendard"/>
                 <a:cs typeface="Pretendard"/>
               </a:rPr>
-              <a:t>달라질 수</a:t>
+              <a:t>실제로</a:t>
             </a:r>
           </a:p>
           <a:p>
@@ -12115,7 +12115,7 @@
                 <a:ea typeface="Pretendard"/>
                 <a:cs typeface="Pretendard"/>
               </a:rPr>
-              <a:t>있다</a:t>
+              <a:t>다르다</a:t>
             </a:r>
           </a:p>
         </p:txBody>
@@ -12186,7 +12186,7 @@
                 <a:ea typeface="Pretendard"/>
                 <a:cs typeface="Pretendard"/>
               </a:rPr>
-              <a:t>값이 같게 나왔다고 순서가 상관없는 것은 아니다 — 데이터가 바뀌면 달라진다. 실습 데이터에서 우연히 같았다고 리포트에 적어 둔다</a:t>
+              <a:t>결측 30건을 어느 값으로 채우는지가 순서에 따라 바뀐다 — 「중복 제거 → 결측 보정」 순서를 고정하고 리포트에 적는다</a:t>
             </a:r>
           </a:p>
         </p:txBody>
@@ -12323,7 +12323,7 @@
       <p:grpSpPr/>
       <p:sp>
         <p:nvSpPr>
-          <p:cNvPr id="2" name="Oval 1"/>
+          <p:cNvPr id="2" name="deckgen:decor"/>
           <p:cNvSpPr/>
           <p:nvPr/>
         </p:nvSpPr>
@@ -12353,7 +12353,7 @@
       </p:sp>
       <p:sp>
         <p:nvSpPr>
-          <p:cNvPr id="3" name="Oval 2"/>
+          <p:cNvPr id="3" name="deckgen:decor"/>
           <p:cNvSpPr/>
           <p:nvPr/>
         </p:nvSpPr>
@@ -12383,7 +12383,7 @@
       </p:sp>
       <p:sp>
         <p:nvSpPr>
-          <p:cNvPr id="4" name="Oval 3"/>
+          <p:cNvPr id="4" name="deckgen:decor"/>
           <p:cNvSpPr/>
           <p:nvPr/>
         </p:nvSpPr>
@@ -12559,7 +12559,7 @@
                 <a:ea typeface="Pretendard"/>
                 <a:cs typeface="Pretendard"/>
               </a:rPr>
-              <a:t>지금 데이터엔 없지만, 검사를 넣어 두면 나중에 원본이 바뀌었을 때 잡아 줍니다</a:t>
+              <a:t>validate_test.py — 지금 데이터엔 없지만, 원본이 바뀌었을 때 잡아 줍니다</a:t>
             </a:r>
           </a:p>
         </p:txBody>
@@ -13352,7 +13352,7 @@
       <p:grpSpPr/>
       <p:sp>
         <p:nvSpPr>
-          <p:cNvPr id="2" name="Oval 1"/>
+          <p:cNvPr id="2" name="deckgen:decor"/>
           <p:cNvSpPr/>
           <p:nvPr/>
         </p:nvSpPr>
@@ -13382,7 +13382,7 @@
       </p:sp>
       <p:sp>
         <p:nvSpPr>
-          <p:cNvPr id="3" name="Oval 2"/>
+          <p:cNvPr id="3" name="deckgen:decor"/>
           <p:cNvSpPr/>
           <p:nvPr/>
         </p:nvSpPr>
@@ -13412,7 +13412,7 @@
       </p:sp>
       <p:sp>
         <p:nvSpPr>
-          <p:cNvPr id="4" name="Oval 3"/>
+          <p:cNvPr id="4" name="deckgen:decor"/>
           <p:cNvSpPr/>
           <p:nvPr/>
         </p:nvSpPr>
@@ -13517,7 +13517,7 @@
                 <a:ea typeface="Pretendard"/>
                 <a:cs typeface="Pretendard"/>
               </a:rPr>
-              <a:t>완성형 — 검증 실패면 종료 코드 1</a:t>
+              <a:t>최종본으로 통째로 바꾼다 — 실패면 종료 코드 1</a:t>
             </a:r>
           </a:p>
         </p:txBody>
@@ -13561,7 +13561,7 @@
         <p:spPr>
           <a:xfrm>
             <a:off x="1143000" y="2781300"/>
-            <a:ext cx="2493955" cy="571500"/>
+            <a:ext cx="1964281" cy="571500"/>
           </a:xfrm>
           <a:prstGeom prst="rect">
             <a:avLst/>
@@ -13591,7 +13591,7 @@
         <p:spPr>
           <a:xfrm>
             <a:off x="1143000" y="2781300"/>
-            <a:ext cx="2493955" cy="571500"/>
+            <a:ext cx="1964281" cy="571500"/>
           </a:xfrm>
           <a:prstGeom prst="rect">
             <a:avLst/>
@@ -13618,7 +13618,7 @@
                 <a:ea typeface="Pretendard"/>
                 <a:cs typeface="Pretendard"/>
               </a:rPr>
-              <a:t>VALID_CATEGORIES</a:t>
+              <a:t>바꾸기</a:t>
             </a:r>
           </a:p>
         </p:txBody>
@@ -13631,8 +13631,8 @@
         </p:nvSpPr>
         <p:spPr>
           <a:xfrm>
-            <a:off x="3636955" y="2781300"/>
-            <a:ext cx="13508045" cy="571500"/>
+            <a:off x="3107281" y="2781300"/>
+            <a:ext cx="14037719" cy="571500"/>
           </a:xfrm>
           <a:prstGeom prst="rect">
             <a:avLst/>
@@ -13663,8 +13663,8 @@
         </p:nvSpPr>
         <p:spPr>
           <a:xfrm>
-            <a:off x="3789355" y="2781300"/>
-            <a:ext cx="13203245" cy="571500"/>
+            <a:off x="3259681" y="2781300"/>
+            <a:ext cx="13732919" cy="571500"/>
           </a:xfrm>
           <a:prstGeom prst="rect">
             <a:avLst/>
@@ -13691,7 +13691,7 @@
                 <a:ea typeface="Pretendard"/>
                 <a:cs typeface="Pretendard"/>
               </a:rPr>
-              <a:t>['식품', '가전', '의류', '도서']</a:t>
+              <a:t>clean_orders.py 를 최종본으로 통째로 (검증 포함)</a:t>
             </a:r>
           </a:p>
         </p:txBody>
@@ -13705,7 +13705,7 @@
         <p:spPr>
           <a:xfrm>
             <a:off x="1143000" y="3429000"/>
-            <a:ext cx="2493955" cy="571500"/>
+            <a:ext cx="1964281" cy="571500"/>
           </a:xfrm>
           <a:prstGeom prst="rect">
             <a:avLst/>
@@ -13735,7 +13735,7 @@
         <p:spPr>
           <a:xfrm>
             <a:off x="1143000" y="3429000"/>
-            <a:ext cx="2493955" cy="571500"/>
+            <a:ext cx="1964281" cy="571500"/>
           </a:xfrm>
           <a:prstGeom prst="rect">
             <a:avLst/>
@@ -13775,8 +13775,8 @@
         </p:nvSpPr>
         <p:spPr>
           <a:xfrm>
-            <a:off x="3636955" y="3429000"/>
-            <a:ext cx="13508045" cy="571500"/>
+            <a:off x="3107281" y="3429000"/>
+            <a:ext cx="14037719" cy="571500"/>
           </a:xfrm>
           <a:prstGeom prst="rect">
             <a:avLst/>
@@ -13807,8 +13807,8 @@
         </p:nvSpPr>
         <p:spPr>
           <a:xfrm>
-            <a:off x="3789355" y="3429000"/>
-            <a:ext cx="13203245" cy="571500"/>
+            <a:off x="3259681" y="3429000"/>
+            <a:ext cx="13732919" cy="571500"/>
           </a:xfrm>
           <a:prstGeom prst="rect">
             <a:avLst/>
@@ -13849,7 +13849,7 @@
         <p:spPr>
           <a:xfrm>
             <a:off x="1143000" y="4076700"/>
-            <a:ext cx="2493955" cy="571500"/>
+            <a:ext cx="1964281" cy="571500"/>
           </a:xfrm>
           <a:prstGeom prst="rect">
             <a:avLst/>
@@ -13879,7 +13879,7 @@
         <p:spPr>
           <a:xfrm>
             <a:off x="1143000" y="4076700"/>
-            <a:ext cx="2493955" cy="571500"/>
+            <a:ext cx="1964281" cy="571500"/>
           </a:xfrm>
           <a:prstGeom prst="rect">
             <a:avLst/>
@@ -13919,8 +13919,8 @@
         </p:nvSpPr>
         <p:spPr>
           <a:xfrm>
-            <a:off x="3636955" y="4076700"/>
-            <a:ext cx="13508045" cy="571500"/>
+            <a:off x="3107281" y="4076700"/>
+            <a:ext cx="14037719" cy="571500"/>
           </a:xfrm>
           <a:prstGeom prst="rect">
             <a:avLst/>
@@ -13951,8 +13951,8 @@
         </p:nvSpPr>
         <p:spPr>
           <a:xfrm>
-            <a:off x="3789355" y="4076700"/>
-            <a:ext cx="13203245" cy="571500"/>
+            <a:off x="3259681" y="4076700"/>
+            <a:ext cx="13732919" cy="571500"/>
           </a:xfrm>
           <a:prstGeom prst="rect">
             <a:avLst/>
@@ -13993,7 +13993,7 @@
         <p:spPr>
           <a:xfrm>
             <a:off x="1143000" y="4724400"/>
-            <a:ext cx="2493955" cy="571500"/>
+            <a:ext cx="1964281" cy="571500"/>
           </a:xfrm>
           <a:prstGeom prst="rect">
             <a:avLst/>
@@ -14023,7 +14023,7 @@
         <p:spPr>
           <a:xfrm>
             <a:off x="1143000" y="4724400"/>
-            <a:ext cx="2493955" cy="571500"/>
+            <a:ext cx="1964281" cy="571500"/>
           </a:xfrm>
           <a:prstGeom prst="rect">
             <a:avLst/>
@@ -14063,8 +14063,8 @@
         </p:nvSpPr>
         <p:spPr>
           <a:xfrm>
-            <a:off x="3636955" y="4724400"/>
-            <a:ext cx="13508045" cy="571500"/>
+            <a:off x="3107281" y="4724400"/>
+            <a:ext cx="14037719" cy="571500"/>
           </a:xfrm>
           <a:prstGeom prst="rect">
             <a:avLst/>
@@ -14095,8 +14095,8 @@
         </p:nvSpPr>
         <p:spPr>
           <a:xfrm>
-            <a:off x="3789355" y="4724400"/>
-            <a:ext cx="13203245" cy="571500"/>
+            <a:off x="3259681" y="4724400"/>
+            <a:ext cx="13732919" cy="571500"/>
           </a:xfrm>
           <a:prstGeom prst="rect">
             <a:avLst/>
@@ -14137,7 +14137,7 @@
         <p:spPr>
           <a:xfrm>
             <a:off x="1143000" y="5372100"/>
-            <a:ext cx="2493955" cy="571500"/>
+            <a:ext cx="1964281" cy="571500"/>
           </a:xfrm>
           <a:prstGeom prst="rect">
             <a:avLst/>
@@ -14167,7 +14167,7 @@
         <p:spPr>
           <a:xfrm>
             <a:off x="1143000" y="5372100"/>
-            <a:ext cx="2493955" cy="571500"/>
+            <a:ext cx="1964281" cy="571500"/>
           </a:xfrm>
           <a:prstGeom prst="rect">
             <a:avLst/>
@@ -14207,8 +14207,8 @@
         </p:nvSpPr>
         <p:spPr>
           <a:xfrm>
-            <a:off x="3636955" y="5372100"/>
-            <a:ext cx="13508045" cy="571500"/>
+            <a:off x="3107281" y="5372100"/>
+            <a:ext cx="14037719" cy="571500"/>
           </a:xfrm>
           <a:prstGeom prst="rect">
             <a:avLst/>
@@ -14239,8 +14239,8 @@
         </p:nvSpPr>
         <p:spPr>
           <a:xfrm>
-            <a:off x="3789355" y="5372100"/>
-            <a:ext cx="13203245" cy="571500"/>
+            <a:off x="3259681" y="5372100"/>
+            <a:ext cx="13732919" cy="571500"/>
           </a:xfrm>
           <a:prstGeom prst="rect">
             <a:avLst/>
@@ -14308,7 +14308,7 @@
                 <a:ea typeface="Pretendard"/>
                 <a:cs typeface="Pretendard"/>
               </a:rPr>
-              <a:t>1-2 에서 배운 종료 코드가 여기서 쓰인다 — 자동화할 때 이 숫자가 성공 여부를 알려 준다</a:t>
+              <a:t>2단계 파일에 이어 붙이지 않는다 · VALID_CATEGORIES = 식품·가전·의류·도서 · 8주차 Airflow 가 이 숫자를 본다</a:t>
             </a:r>
           </a:p>
         </p:txBody>

--- a/data-eng/decks/w3d5s2.pptx
+++ b/data-eng/decks/w3d5s2.pptx
@@ -12664,7 +12664,7 @@
                 <a:ea typeface="Pretendard"/>
                 <a:cs typeface="Pretendard"/>
               </a:rPr>
-              <a:t>1 validate()</a:t>
+              <a:t>1. validate()</a:t>
             </a:r>
           </a:p>
         </p:txBody>
@@ -12828,7 +12828,7 @@
                 <a:ea typeface="Pretendard"/>
                 <a:cs typeface="Pretendard"/>
               </a:rPr>
-              <a:t>2 정제본 검사</a:t>
+              <a:t>2. 정제본 검사</a:t>
             </a:r>
           </a:p>
         </p:txBody>
@@ -12992,7 +12992,7 @@
                 <a:ea typeface="Pretendard"/>
                 <a:cs typeface="Pretendard"/>
               </a:rPr>
-              <a:t>3 나쁜 값 주입</a:t>
+              <a:t>3. 나쁜 값 주입</a:t>
             </a:r>
           </a:p>
         </p:txBody>
@@ -13156,7 +13156,7 @@
                 <a:ea typeface="Pretendard"/>
                 <a:cs typeface="Pretendard"/>
               </a:rPr>
-              <a:t>4 다시 검사</a:t>
+              <a:t>4. 다시 검사</a:t>
             </a:r>
           </a:p>
         </p:txBody>
